--- a/TEMA2/Act2.2_Reporte_de_practica_Rafael_Aaquino-villanueva-ISC-LYA1.pptx
+++ b/TEMA2/Act2.2_Reporte_de_practica_Rafael_Aaquino-villanueva-ISC-LYA1.pptx
@@ -209,7 +209,7 @@
           <a:p>
             <a:fld id="{CE8B5F02-D1F5-4A8C-9E16-879D2FAAE6D2}" type="datetimeFigureOut">
               <a:rPr lang="es-MX" smtClean="0"/>
-              <a:t>03/03/2026</a:t>
+              <a:t>14/03/2026</a:t>
             </a:fld>
             <a:endParaRPr lang="es-MX"/>
           </a:p>
@@ -626,7 +626,7 @@
           <a:p>
             <a:fld id="{B744A13C-A177-47DD-903A-D74B08377F6A}" type="datetimeFigureOut">
               <a:rPr lang="es-MX" smtClean="0"/>
-              <a:t>03/03/2026</a:t>
+              <a:t>14/03/2026</a:t>
             </a:fld>
             <a:endParaRPr lang="es-MX"/>
           </a:p>
@@ -826,7 +826,7 @@
           <a:p>
             <a:fld id="{B744A13C-A177-47DD-903A-D74B08377F6A}" type="datetimeFigureOut">
               <a:rPr lang="es-MX" smtClean="0"/>
-              <a:t>03/03/2026</a:t>
+              <a:t>14/03/2026</a:t>
             </a:fld>
             <a:endParaRPr lang="es-MX"/>
           </a:p>
@@ -1036,7 +1036,7 @@
           <a:p>
             <a:fld id="{B744A13C-A177-47DD-903A-D74B08377F6A}" type="datetimeFigureOut">
               <a:rPr lang="es-MX" smtClean="0"/>
-              <a:t>03/03/2026</a:t>
+              <a:t>14/03/2026</a:t>
             </a:fld>
             <a:endParaRPr lang="es-MX"/>
           </a:p>
@@ -1236,7 +1236,7 @@
           <a:p>
             <a:fld id="{B744A13C-A177-47DD-903A-D74B08377F6A}" type="datetimeFigureOut">
               <a:rPr lang="es-MX" smtClean="0"/>
-              <a:t>03/03/2026</a:t>
+              <a:t>14/03/2026</a:t>
             </a:fld>
             <a:endParaRPr lang="es-MX"/>
           </a:p>
@@ -1512,7 +1512,7 @@
           <a:p>
             <a:fld id="{B744A13C-A177-47DD-903A-D74B08377F6A}" type="datetimeFigureOut">
               <a:rPr lang="es-MX" smtClean="0"/>
-              <a:t>03/03/2026</a:t>
+              <a:t>14/03/2026</a:t>
             </a:fld>
             <a:endParaRPr lang="es-MX"/>
           </a:p>
@@ -1780,7 +1780,7 @@
           <a:p>
             <a:fld id="{B744A13C-A177-47DD-903A-D74B08377F6A}" type="datetimeFigureOut">
               <a:rPr lang="es-MX" smtClean="0"/>
-              <a:t>03/03/2026</a:t>
+              <a:t>14/03/2026</a:t>
             </a:fld>
             <a:endParaRPr lang="es-MX"/>
           </a:p>
@@ -2195,7 +2195,7 @@
           <a:p>
             <a:fld id="{B744A13C-A177-47DD-903A-D74B08377F6A}" type="datetimeFigureOut">
               <a:rPr lang="es-MX" smtClean="0"/>
-              <a:t>03/03/2026</a:t>
+              <a:t>14/03/2026</a:t>
             </a:fld>
             <a:endParaRPr lang="es-MX"/>
           </a:p>
@@ -2337,7 +2337,7 @@
           <a:p>
             <a:fld id="{B744A13C-A177-47DD-903A-D74B08377F6A}" type="datetimeFigureOut">
               <a:rPr lang="es-MX" smtClean="0"/>
-              <a:t>03/03/2026</a:t>
+              <a:t>14/03/2026</a:t>
             </a:fld>
             <a:endParaRPr lang="es-MX"/>
           </a:p>
@@ -2450,7 +2450,7 @@
           <a:p>
             <a:fld id="{B744A13C-A177-47DD-903A-D74B08377F6A}" type="datetimeFigureOut">
               <a:rPr lang="es-MX" smtClean="0"/>
-              <a:t>03/03/2026</a:t>
+              <a:t>14/03/2026</a:t>
             </a:fld>
             <a:endParaRPr lang="es-MX"/>
           </a:p>
@@ -2763,7 +2763,7 @@
           <a:p>
             <a:fld id="{B744A13C-A177-47DD-903A-D74B08377F6A}" type="datetimeFigureOut">
               <a:rPr lang="es-MX" smtClean="0"/>
-              <a:t>03/03/2026</a:t>
+              <a:t>14/03/2026</a:t>
             </a:fld>
             <a:endParaRPr lang="es-MX"/>
           </a:p>
@@ -3052,7 +3052,7 @@
           <a:p>
             <a:fld id="{B744A13C-A177-47DD-903A-D74B08377F6A}" type="datetimeFigureOut">
               <a:rPr lang="es-MX" smtClean="0"/>
-              <a:t>03/03/2026</a:t>
+              <a:t>14/03/2026</a:t>
             </a:fld>
             <a:endParaRPr lang="es-MX"/>
           </a:p>
@@ -3295,7 +3295,7 @@
           <a:p>
             <a:fld id="{B744A13C-A177-47DD-903A-D74B08377F6A}" type="datetimeFigureOut">
               <a:rPr lang="es-MX" smtClean="0"/>
-              <a:t>03/03/2026</a:t>
+              <a:t>14/03/2026</a:t>
             </a:fld>
             <a:endParaRPr lang="es-MX"/>
           </a:p>
@@ -4883,7 +4883,7 @@
                 <a:ea typeface="Times New Roman" panose="02020603050405020304" pitchFamily="18" charset="0"/>
                 <a:cs typeface="Arial" panose="020B0604020202020204" pitchFamily="34" charset="0"/>
               </a:rPr>
-              <a:t>31</a:t>
+              <a:t>14</a:t>
             </a:r>
             <a:r>
               <a:rPr lang="es-MX" sz="2000" b="1" kern="0" dirty="0">
@@ -4892,7 +4892,24 @@
                 <a:ea typeface="Times New Roman" panose="02020603050405020304" pitchFamily="18" charset="0"/>
                 <a:cs typeface="Arial" panose="020B0604020202020204" pitchFamily="34" charset="0"/>
               </a:rPr>
-              <a:t> DE ENERO DE 2026</a:t>
+              <a:t> DE </a:t>
+            </a:r>
+            <a:r>
+              <a:rPr lang="es-MX" sz="2000" b="1" kern="0" dirty="0">
+                <a:latin typeface="Arial" panose="020B0604020202020204" pitchFamily="34" charset="0"/>
+                <a:ea typeface="Times New Roman" panose="02020603050405020304" pitchFamily="18" charset="0"/>
+                <a:cs typeface="Arial" panose="020B0604020202020204" pitchFamily="34" charset="0"/>
+              </a:rPr>
+              <a:t>FEBR</a:t>
+            </a:r>
+            <a:r>
+              <a:rPr lang="es-MX" sz="2000" b="1" kern="0" dirty="0">
+                <a:effectLst/>
+                <a:latin typeface="Arial" panose="020B0604020202020204" pitchFamily="34" charset="0"/>
+                <a:ea typeface="Times New Roman" panose="02020603050405020304" pitchFamily="18" charset="0"/>
+                <a:cs typeface="Arial" panose="020B0604020202020204" pitchFamily="34" charset="0"/>
+              </a:rPr>
+              <a:t>ERO DE 2026</a:t>
             </a:r>
             <a:r>
               <a:rPr lang="es-MX" sz="1800" b="1" kern="0" dirty="0">
